--- a/media/resources/files/Onduktardyn_Orunduk_Maanisi_TuuraJeKata_copy.pptx
+++ b/media/resources/files/Onduktardyn_Orunduk_Maanisi_TuuraJeKata_copy.pptx
@@ -2250,7 +2250,7 @@
                 <a:ea typeface="+mn-ea"/>
                 <a:cs typeface="+mn-cs"/>
               </a:rPr>
-              <a:t>Турдуу пикирлер учун ыраазычылык билдиребиз.</a:t>
+              <a:t>Түрдүү пикирлер үчүн ыраазычылык билдиребиз.</a:t>
             </a:r>
           </a:p>
           <a:p>

--- a/media/resources/files/Onduktardyn_Orunduk_Maanisi_TuuraJeKata_copy.pptx
+++ b/media/resources/files/Onduktardyn_Orunduk_Maanisi_TuuraJeKata_copy.pptx
@@ -4619,7 +4619,7 @@
               <a:pPr algn="ctr"/>
               <a:r>
                 <a:rPr lang="en-GB" sz="3200" spc="300" dirty="0"/>
-                <a:t>7.3</a:t>
+                <a:t>7,3</a:t>
               </a:r>
               <a:r>
                 <a:rPr lang="en-GB" sz="3200" dirty="0"/>
@@ -4870,7 +4870,7 @@
               <a:pPr algn="ctr"/>
               <a:r>
                 <a:rPr lang="en-GB" sz="3200" spc="300" dirty="0"/>
-                <a:t>2.91</a:t>
+                <a:t>2,91</a:t>
               </a:r>
               <a:r>
                 <a:rPr lang="en-GB" sz="3200" dirty="0"/>
@@ -5131,7 +5131,7 @@
               <a:pPr algn="ctr"/>
               <a:r>
                 <a:rPr lang="en-GB" sz="3200" spc="300" dirty="0"/>
-                <a:t>9.18</a:t>
+                <a:t>9,18</a:t>
               </a:r>
               <a:r>
                 <a:rPr lang="en-GB" sz="3200" dirty="0"/>
@@ -5388,7 +5388,7 @@
               <a:pPr algn="ctr"/>
               <a:r>
                 <a:rPr lang="en-GB" sz="3200" spc="300" dirty="0"/>
-                <a:t>3.251</a:t>
+                <a:t>3,251</a:t>
               </a:r>
               <a:r>
                 <a:rPr lang="en-GB" sz="3200" dirty="0"/>
@@ -5639,7 +5639,7 @@
               <a:pPr algn="ctr"/>
               <a:r>
                 <a:rPr lang="en-GB" sz="3200" spc="300" dirty="0"/>
-                <a:t>6.203</a:t>
+                <a:t>6,203</a:t>
               </a:r>
               <a:r>
                 <a:rPr lang="en-GB" sz="3200" dirty="0"/>
@@ -5890,7 +5890,7 @@
               <a:pPr algn="ctr"/>
               <a:r>
                 <a:rPr lang="en-GB" sz="3200" spc="300" dirty="0"/>
-                <a:t>52.134</a:t>
+                <a:t>52,134</a:t>
               </a:r>
               <a:r>
                 <a:rPr lang="en-GB" sz="3200" dirty="0"/>
@@ -6133,7 +6133,7 @@
               <a:pPr algn="ctr"/>
               <a:r>
                 <a:rPr lang="en-GB" sz="3200" spc="300" dirty="0"/>
-                <a:t>12.0681</a:t>
+                <a:t>12,0681</a:t>
               </a:r>
               <a:endParaRPr lang="en-GB" sz="3200" dirty="0"/>
             </a:p>
@@ -6376,7 +6376,7 @@
               <a:pPr algn="ctr"/>
               <a:r>
                 <a:rPr lang="en-GB" sz="3200" spc="300" dirty="0"/>
-                <a:t>7.182</a:t>
+                <a:t>7,182</a:t>
               </a:r>
               <a:r>
                 <a:rPr lang="ky-KG" sz="3200" spc="300" dirty="0"/>
@@ -6710,7 +6710,7 @@
               <a:pPr algn="ctr"/>
               <a:r>
                 <a:rPr lang="en-GB" sz="3200" spc="300" dirty="0"/>
-                <a:t>0.834</a:t>
+                <a:t>0,834</a:t>
               </a:r>
               <a:r>
                 <a:rPr lang="en-GB" sz="3200" dirty="0"/>
@@ -6961,7 +6961,7 @@
               <a:pPr algn="ctr"/>
               <a:r>
                 <a:rPr lang="en-GB" sz="3200" spc="300" dirty="0"/>
-                <a:t>4.0081</a:t>
+                <a:t>4,0081</a:t>
               </a:r>
               <a:r>
                 <a:rPr lang="en-GB" sz="3200" dirty="0"/>
@@ -7212,7 +7212,7 @@
               <a:pPr algn="ctr"/>
               <a:r>
                 <a:rPr lang="en-GB" sz="3200" spc="300" dirty="0"/>
-                <a:t>8.0931784</a:t>
+                <a:t>8,0931784</a:t>
               </a:r>
               <a:r>
                 <a:rPr lang="en-GB" sz="3200" dirty="0"/>
@@ -7455,7 +7455,7 @@
               <a:pPr algn="ctr"/>
               <a:r>
                 <a:rPr lang="en-GB" sz="3200" spc="300" dirty="0"/>
-                <a:t>3.7019</a:t>
+                <a:t>3,7019</a:t>
               </a:r>
               <a:endParaRPr lang="en-GB" sz="3200" dirty="0"/>
             </a:p>
@@ -7698,7 +7698,7 @@
               <a:pPr algn="ctr"/>
               <a:r>
                 <a:rPr lang="en-GB" sz="3200" spc="300" dirty="0"/>
-                <a:t>1.2043</a:t>
+                <a:t>1,2043</a:t>
               </a:r>
               <a:r>
                 <a:rPr lang="en-GB" sz="3200" dirty="0"/>
@@ -7949,7 +7949,7 @@
               <a:pPr algn="ctr"/>
               <a:r>
                 <a:rPr lang="en-GB" sz="3200" spc="300" dirty="0"/>
-                <a:t>50.618</a:t>
+                <a:t>50,618</a:t>
               </a:r>
               <a:r>
                 <a:rPr lang="en-GB" sz="3200" dirty="0"/>
@@ -8200,7 +8200,7 @@
               <a:pPr algn="ctr"/>
               <a:r>
                 <a:rPr lang="en-GB" sz="3200" spc="300" dirty="0"/>
-                <a:t>3.14</a:t>
+                <a:t>3,14</a:t>
               </a:r>
               <a:r>
                 <a:rPr lang="en-GB" sz="3200" dirty="0"/>
@@ -9450,7 +9450,7 @@
               <a:pPr algn="ctr"/>
               <a:r>
                 <a:rPr lang="en-GB" sz="3200" spc="300" dirty="0"/>
-                <a:t>7.3</a:t>
+                <a:t>7,3</a:t>
               </a:r>
               <a:r>
                 <a:rPr lang="en-GB" sz="3200" dirty="0"/>
@@ -9701,7 +9701,7 @@
               <a:pPr algn="ctr"/>
               <a:r>
                 <a:rPr lang="en-GB" sz="3200" spc="300" dirty="0"/>
-                <a:t>2.91</a:t>
+                <a:t>2,91</a:t>
               </a:r>
               <a:r>
                 <a:rPr lang="en-GB" sz="3200" dirty="0"/>
@@ -9962,7 +9962,7 @@
               <a:pPr algn="ctr"/>
               <a:r>
                 <a:rPr lang="en-GB" sz="3200" spc="300" dirty="0"/>
-                <a:t>9.18</a:t>
+                <a:t>9,18</a:t>
               </a:r>
               <a:r>
                 <a:rPr lang="en-GB" sz="3200" dirty="0"/>
@@ -10219,7 +10219,7 @@
               <a:pPr algn="ctr"/>
               <a:r>
                 <a:rPr lang="en-GB" sz="3200" spc="300" dirty="0"/>
-                <a:t>3.251</a:t>
+                <a:t>3,251</a:t>
               </a:r>
               <a:r>
                 <a:rPr lang="en-GB" sz="3200" dirty="0"/>
@@ -10470,7 +10470,7 @@
               <a:pPr algn="ctr"/>
               <a:r>
                 <a:rPr lang="en-GB" sz="3200" spc="300" dirty="0"/>
-                <a:t>6.203</a:t>
+                <a:t>6,203</a:t>
               </a:r>
               <a:r>
                 <a:rPr lang="en-GB" sz="3200" dirty="0"/>
@@ -10721,7 +10721,7 @@
               <a:pPr algn="ctr"/>
               <a:r>
                 <a:rPr lang="en-GB" sz="3200" spc="300" dirty="0"/>
-                <a:t>52.134</a:t>
+                <a:t>52,134</a:t>
               </a:r>
               <a:r>
                 <a:rPr lang="en-GB" sz="3200" dirty="0"/>
@@ -10964,7 +10964,7 @@
               <a:pPr algn="ctr"/>
               <a:r>
                 <a:rPr lang="en-GB" sz="3200" spc="300" dirty="0"/>
-                <a:t>12.0681</a:t>
+                <a:t>12,0681</a:t>
               </a:r>
               <a:endParaRPr lang="en-GB" sz="3200" dirty="0"/>
             </a:p>
@@ -13178,7 +13178,7 @@
               <a:pPr algn="ctr"/>
               <a:r>
                 <a:rPr lang="en-GB" sz="3200" spc="300" dirty="0"/>
-                <a:t>7.3</a:t>
+                <a:t>7,3</a:t>
               </a:r>
               <a:r>
                 <a:rPr lang="en-GB" sz="3200" dirty="0"/>
@@ -13429,7 +13429,7 @@
               <a:pPr algn="ctr"/>
               <a:r>
                 <a:rPr lang="en-GB" sz="3200" spc="300" dirty="0"/>
-                <a:t>2.91</a:t>
+                <a:t>2,91</a:t>
               </a:r>
               <a:r>
                 <a:rPr lang="en-GB" sz="3200" dirty="0"/>
@@ -13690,7 +13690,7 @@
               <a:pPr algn="ctr"/>
               <a:r>
                 <a:rPr lang="en-GB" sz="3200" spc="300" dirty="0"/>
-                <a:t>9.18</a:t>
+                <a:t>9,18</a:t>
               </a:r>
               <a:r>
                 <a:rPr lang="en-GB" sz="3200" dirty="0"/>
@@ -13947,7 +13947,7 @@
               <a:pPr algn="ctr"/>
               <a:r>
                 <a:rPr lang="en-GB" sz="3200" spc="300" dirty="0"/>
-                <a:t>3.251</a:t>
+                <a:t>3,251</a:t>
               </a:r>
               <a:r>
                 <a:rPr lang="en-GB" sz="3200" dirty="0"/>
@@ -14198,7 +14198,7 @@
               <a:pPr algn="ctr"/>
               <a:r>
                 <a:rPr lang="en-GB" sz="3200" spc="300" dirty="0"/>
-                <a:t>6.203</a:t>
+                <a:t>6,203</a:t>
               </a:r>
               <a:r>
                 <a:rPr lang="en-GB" sz="3200" dirty="0"/>
@@ -14449,7 +14449,7 @@
               <a:pPr algn="ctr"/>
               <a:r>
                 <a:rPr lang="en-GB" sz="3200" spc="300" dirty="0"/>
-                <a:t>52.134</a:t>
+                <a:t>52,134</a:t>
               </a:r>
               <a:r>
                 <a:rPr lang="en-GB" sz="3200" dirty="0"/>
@@ -14692,7 +14692,7 @@
               <a:pPr algn="ctr"/>
               <a:r>
                 <a:rPr lang="en-GB" sz="3200" spc="300" dirty="0"/>
-                <a:t>12.0681</a:t>
+                <a:t>12,0681</a:t>
               </a:r>
               <a:endParaRPr lang="en-GB" sz="3200" dirty="0"/>
             </a:p>
@@ -14935,7 +14935,7 @@
               <a:pPr algn="ctr"/>
               <a:r>
                 <a:rPr lang="en-GB" sz="3200" spc="300" dirty="0"/>
-                <a:t>7.182</a:t>
+                <a:t>7,182</a:t>
               </a:r>
               <a:r>
                 <a:rPr lang="ky-KG" sz="3200" spc="300" dirty="0"/>
@@ -15269,7 +15269,7 @@
               <a:pPr algn="ctr"/>
               <a:r>
                 <a:rPr lang="en-GB" sz="3200" spc="300" dirty="0"/>
-                <a:t>0.834</a:t>
+                <a:t>0,834</a:t>
               </a:r>
               <a:r>
                 <a:rPr lang="en-GB" sz="3200" dirty="0"/>
@@ -15520,7 +15520,7 @@
               <a:pPr algn="ctr"/>
               <a:r>
                 <a:rPr lang="en-GB" sz="3200" spc="300" dirty="0"/>
-                <a:t>4.0081</a:t>
+                <a:t>4,0081</a:t>
               </a:r>
               <a:r>
                 <a:rPr lang="en-GB" sz="3200" dirty="0"/>
@@ -15771,7 +15771,7 @@
               <a:pPr algn="ctr"/>
               <a:r>
                 <a:rPr lang="en-GB" sz="3200" spc="300" dirty="0"/>
-                <a:t>8.0931784</a:t>
+                <a:t>8,0931784</a:t>
               </a:r>
               <a:r>
                 <a:rPr lang="en-GB" sz="3200" dirty="0"/>
@@ -16014,7 +16014,7 @@
               <a:pPr algn="ctr"/>
               <a:r>
                 <a:rPr lang="en-GB" sz="3200" spc="300" dirty="0"/>
-                <a:t>3.7019</a:t>
+                <a:t>3,7019</a:t>
               </a:r>
               <a:endParaRPr lang="en-GB" sz="3200" dirty="0"/>
             </a:p>
@@ -16257,7 +16257,7 @@
               <a:pPr algn="ctr"/>
               <a:r>
                 <a:rPr lang="en-GB" sz="3200" spc="300" dirty="0"/>
-                <a:t>1.2043</a:t>
+                <a:t>1,2043</a:t>
               </a:r>
               <a:r>
                 <a:rPr lang="en-GB" sz="3200" dirty="0"/>
@@ -16508,7 +16508,7 @@
               <a:pPr algn="ctr"/>
               <a:r>
                 <a:rPr lang="en-GB" sz="3200" spc="300" dirty="0"/>
-                <a:t>50.618</a:t>
+                <a:t>50,618</a:t>
               </a:r>
               <a:r>
                 <a:rPr lang="en-GB" sz="3200" dirty="0"/>
@@ -16759,7 +16759,7 @@
               <a:pPr algn="ctr"/>
               <a:r>
                 <a:rPr lang="en-GB" sz="3200" spc="300" dirty="0"/>
-                <a:t>3.14</a:t>
+                <a:t>3,14</a:t>
               </a:r>
               <a:r>
                 <a:rPr lang="en-GB" sz="3200" dirty="0"/>
@@ -19095,7 +19095,7 @@
               <a:pPr algn="ctr"/>
               <a:r>
                 <a:rPr lang="en-GB" sz="3200" spc="300" dirty="0"/>
-                <a:t>7.3</a:t>
+                <a:t>7,3</a:t>
               </a:r>
               <a:r>
                 <a:rPr lang="en-GB" sz="3200" dirty="0"/>
@@ -19346,7 +19346,7 @@
               <a:pPr algn="ctr"/>
               <a:r>
                 <a:rPr lang="en-GB" sz="3200" spc="300" dirty="0"/>
-                <a:t>2.91</a:t>
+                <a:t>2,91</a:t>
               </a:r>
               <a:r>
                 <a:rPr lang="en-GB" sz="3200" dirty="0"/>
@@ -19607,7 +19607,7 @@
               <a:pPr algn="ctr"/>
               <a:r>
                 <a:rPr lang="en-GB" sz="3200" spc="300" dirty="0"/>
-                <a:t>9.18</a:t>
+                <a:t>9,18</a:t>
               </a:r>
               <a:r>
                 <a:rPr lang="en-GB" sz="3200" dirty="0"/>
@@ -19864,7 +19864,7 @@
               <a:pPr algn="ctr"/>
               <a:r>
                 <a:rPr lang="en-GB" sz="3200" spc="300" dirty="0"/>
-                <a:t>3.251</a:t>
+                <a:t>3,251</a:t>
               </a:r>
               <a:r>
                 <a:rPr lang="en-GB" sz="3200" dirty="0"/>
@@ -20115,7 +20115,7 @@
               <a:pPr algn="ctr"/>
               <a:r>
                 <a:rPr lang="en-GB" sz="3200" spc="300" dirty="0"/>
-                <a:t>6.203</a:t>
+                <a:t>6,203</a:t>
               </a:r>
               <a:r>
                 <a:rPr lang="en-GB" sz="3200" dirty="0"/>
@@ -20366,7 +20366,7 @@
               <a:pPr algn="ctr"/>
               <a:r>
                 <a:rPr lang="en-GB" sz="3200" spc="300" dirty="0"/>
-                <a:t>52.134</a:t>
+                <a:t>52,134</a:t>
               </a:r>
               <a:r>
                 <a:rPr lang="en-GB" sz="3200" dirty="0"/>
@@ -20609,7 +20609,7 @@
               <a:pPr algn="ctr"/>
               <a:r>
                 <a:rPr lang="en-GB" sz="3200" spc="300" dirty="0"/>
-                <a:t>12.0681</a:t>
+                <a:t>12,0681</a:t>
               </a:r>
               <a:endParaRPr lang="en-GB" sz="3200" dirty="0"/>
             </a:p>
@@ -20852,7 +20852,7 @@
               <a:pPr algn="ctr"/>
               <a:r>
                 <a:rPr lang="en-GB" sz="3200" spc="300" dirty="0"/>
-                <a:t>7.182</a:t>
+                <a:t>7,182</a:t>
               </a:r>
               <a:r>
                 <a:rPr lang="ky-KG" sz="3200" spc="300" dirty="0"/>
@@ -21186,7 +21186,7 @@
               <a:pPr algn="ctr"/>
               <a:r>
                 <a:rPr lang="en-GB" sz="3200" spc="300" dirty="0"/>
-                <a:t>0.834</a:t>
+                <a:t>0,834</a:t>
               </a:r>
               <a:r>
                 <a:rPr lang="en-GB" sz="3200" dirty="0"/>
@@ -21437,7 +21437,7 @@
               <a:pPr algn="ctr"/>
               <a:r>
                 <a:rPr lang="en-GB" sz="3200" spc="300" dirty="0"/>
-                <a:t>4.0081</a:t>
+                <a:t>4,0081</a:t>
               </a:r>
               <a:r>
                 <a:rPr lang="en-GB" sz="3200" dirty="0"/>
@@ -21688,7 +21688,7 @@
               <a:pPr algn="ctr"/>
               <a:r>
                 <a:rPr lang="en-GB" sz="3200" spc="300" dirty="0"/>
-                <a:t>8.0931784</a:t>
+                <a:t>8,0931784</a:t>
               </a:r>
               <a:r>
                 <a:rPr lang="en-GB" sz="3200" dirty="0"/>
@@ -21931,7 +21931,7 @@
               <a:pPr algn="ctr"/>
               <a:r>
                 <a:rPr lang="en-GB" sz="3200" spc="300" dirty="0"/>
-                <a:t>3.7019</a:t>
+                <a:t>3,7019</a:t>
               </a:r>
               <a:endParaRPr lang="en-GB" sz="3200" dirty="0"/>
             </a:p>
@@ -22174,7 +22174,7 @@
               <a:pPr algn="ctr"/>
               <a:r>
                 <a:rPr lang="en-GB" sz="3200" spc="300" dirty="0"/>
-                <a:t>1.2043</a:t>
+                <a:t>1,2043</a:t>
               </a:r>
               <a:r>
                 <a:rPr lang="en-GB" sz="3200" dirty="0"/>
@@ -22425,7 +22425,7 @@
               <a:pPr algn="ctr"/>
               <a:r>
                 <a:rPr lang="en-GB" sz="3200" spc="300" dirty="0"/>
-                <a:t>50.618</a:t>
+                <a:t>50,618</a:t>
               </a:r>
               <a:r>
                 <a:rPr lang="en-GB" sz="3200" dirty="0"/>
@@ -22676,7 +22676,7 @@
               <a:pPr algn="ctr"/>
               <a:r>
                 <a:rPr lang="en-GB" sz="3200" spc="300" dirty="0"/>
-                <a:t>3.14</a:t>
+                <a:t>3,14</a:t>
               </a:r>
               <a:r>
                 <a:rPr lang="en-GB" sz="3200" dirty="0"/>
@@ -25752,7 +25752,7 @@
               <a:pPr algn="ctr"/>
               <a:r>
                 <a:rPr lang="en-GB" sz="3200" spc="300" dirty="0"/>
-                <a:t>7.3</a:t>
+                <a:t>7,3</a:t>
               </a:r>
               <a:r>
                 <a:rPr lang="en-GB" sz="3200" dirty="0"/>
@@ -26003,7 +26003,7 @@
               <a:pPr algn="ctr"/>
               <a:r>
                 <a:rPr lang="en-GB" sz="3200" spc="300" dirty="0"/>
-                <a:t>2.91</a:t>
+                <a:t>2,91</a:t>
               </a:r>
               <a:r>
                 <a:rPr lang="en-GB" sz="3200" dirty="0"/>
@@ -26264,7 +26264,7 @@
               <a:pPr algn="ctr"/>
               <a:r>
                 <a:rPr lang="en-GB" sz="3200" spc="300" dirty="0"/>
-                <a:t>9.18</a:t>
+                <a:t>9,18</a:t>
               </a:r>
               <a:r>
                 <a:rPr lang="en-GB" sz="3200" dirty="0"/>
@@ -26521,7 +26521,7 @@
               <a:pPr algn="ctr"/>
               <a:r>
                 <a:rPr lang="en-GB" sz="3200" spc="300" dirty="0"/>
-                <a:t>3.251</a:t>
+                <a:t>3,251</a:t>
               </a:r>
               <a:r>
                 <a:rPr lang="en-GB" sz="3200" dirty="0"/>
@@ -26772,7 +26772,7 @@
               <a:pPr algn="ctr"/>
               <a:r>
                 <a:rPr lang="en-GB" sz="3200" spc="300" dirty="0"/>
-                <a:t>6.203</a:t>
+                <a:t>6,203</a:t>
               </a:r>
               <a:r>
                 <a:rPr lang="en-GB" sz="3200" dirty="0"/>
@@ -27023,7 +27023,7 @@
               <a:pPr algn="ctr"/>
               <a:r>
                 <a:rPr lang="en-GB" sz="3200" spc="300" dirty="0"/>
-                <a:t>52.134</a:t>
+                <a:t>52,134</a:t>
               </a:r>
               <a:r>
                 <a:rPr lang="en-GB" sz="3200" dirty="0"/>
@@ -27266,7 +27266,7 @@
               <a:pPr algn="ctr"/>
               <a:r>
                 <a:rPr lang="en-GB" sz="3200" spc="300" dirty="0"/>
-                <a:t>12.0681</a:t>
+                <a:t>12,0681</a:t>
               </a:r>
               <a:endParaRPr lang="en-GB" sz="3200" dirty="0"/>
             </a:p>
@@ -27509,7 +27509,7 @@
               <a:pPr algn="ctr"/>
               <a:r>
                 <a:rPr lang="en-GB" sz="3200" spc="300" dirty="0"/>
-                <a:t>7.182</a:t>
+                <a:t>7,182</a:t>
               </a:r>
               <a:r>
                 <a:rPr lang="ky-KG" sz="3200" spc="300" dirty="0"/>
@@ -27843,7 +27843,7 @@
               <a:pPr algn="ctr"/>
               <a:r>
                 <a:rPr lang="en-GB" sz="3200" spc="300" dirty="0"/>
-                <a:t>0.834</a:t>
+                <a:t>0,834</a:t>
               </a:r>
               <a:r>
                 <a:rPr lang="en-GB" sz="3200" dirty="0"/>
@@ -28094,7 +28094,7 @@
               <a:pPr algn="ctr"/>
               <a:r>
                 <a:rPr lang="en-GB" sz="3200" spc="300" dirty="0"/>
-                <a:t>4.0081</a:t>
+                <a:t>4,0081</a:t>
               </a:r>
               <a:r>
                 <a:rPr lang="en-GB" sz="3200" dirty="0"/>
@@ -28345,7 +28345,7 @@
               <a:pPr algn="ctr"/>
               <a:r>
                 <a:rPr lang="en-GB" sz="3200" spc="300" dirty="0"/>
-                <a:t>8.0931784</a:t>
+                <a:t>8,0931784</a:t>
               </a:r>
               <a:r>
                 <a:rPr lang="en-GB" sz="3200" dirty="0"/>
@@ -28588,7 +28588,7 @@
               <a:pPr algn="ctr"/>
               <a:r>
                 <a:rPr lang="en-GB" sz="3200" spc="300" dirty="0"/>
-                <a:t>3.7019</a:t>
+                <a:t>3,7019</a:t>
               </a:r>
               <a:endParaRPr lang="en-GB" sz="3200" dirty="0"/>
             </a:p>
@@ -28831,7 +28831,7 @@
               <a:pPr algn="ctr"/>
               <a:r>
                 <a:rPr lang="en-GB" sz="3200" spc="300" dirty="0"/>
-                <a:t>1.2043</a:t>
+                <a:t>1,2043</a:t>
               </a:r>
               <a:r>
                 <a:rPr lang="en-GB" sz="3200" dirty="0"/>
@@ -29082,7 +29082,7 @@
               <a:pPr algn="ctr"/>
               <a:r>
                 <a:rPr lang="en-GB" sz="3200" spc="300" dirty="0"/>
-                <a:t>50.618</a:t>
+                <a:t>50,618</a:t>
               </a:r>
               <a:r>
                 <a:rPr lang="en-GB" sz="3200" dirty="0"/>
@@ -29333,7 +29333,7 @@
               <a:pPr algn="ctr"/>
               <a:r>
                 <a:rPr lang="en-GB" sz="3200" spc="300" dirty="0"/>
-                <a:t>3.14</a:t>
+                <a:t>3,14</a:t>
               </a:r>
               <a:r>
                 <a:rPr lang="en-GB" sz="3200" dirty="0"/>

--- a/media/resources/files/Onduktardyn_Orunduk_Maanisi_TuuraJeKata_copy.pptx
+++ b/media/resources/files/Onduktardyn_Orunduk_Maanisi_TuuraJeKata_copy.pptx
@@ -7212,7 +7212,7 @@
               <a:pPr algn="ctr"/>
               <a:r>
                 <a:rPr lang="en-GB" sz="3200" spc="300" dirty="0"/>
-                <a:t>8,0931784</a:t>
+                <a:t>8,0 931 784</a:t>
               </a:r>
               <a:r>
                 <a:rPr lang="en-GB" sz="3200" dirty="0"/>
@@ -15771,7 +15771,7 @@
               <a:pPr algn="ctr"/>
               <a:r>
                 <a:rPr lang="en-GB" sz="3200" spc="300" dirty="0"/>
-                <a:t>8,0931784</a:t>
+                <a:t>8,0 931 784</a:t>
               </a:r>
               <a:r>
                 <a:rPr lang="en-GB" sz="3200" dirty="0"/>
@@ -21688,7 +21688,7 @@
               <a:pPr algn="ctr"/>
               <a:r>
                 <a:rPr lang="en-GB" sz="3200" spc="300" dirty="0"/>
-                <a:t>8,0931784</a:t>
+                <a:t>8,0 931 784</a:t>
               </a:r>
               <a:r>
                 <a:rPr lang="en-GB" sz="3200" dirty="0"/>
@@ -28345,7 +28345,7 @@
               <a:pPr algn="ctr"/>
               <a:r>
                 <a:rPr lang="en-GB" sz="3200" spc="300" dirty="0"/>
-                <a:t>8,0931784</a:t>
+                <a:t>8,0 931 784</a:t>
               </a:r>
               <a:r>
                 <a:rPr lang="en-GB" sz="3200" dirty="0"/>
